--- a/docs/poc-tracker-architecture.pptx
+++ b/docs/poc-tracker-architecture.pptx
@@ -1036,7 +1036,7 @@
                 <a:ea typeface="Calibri" pitchFamily="34" charset="-122"/>
                 <a:cs typeface="Calibri" pitchFamily="34" charset="-120"/>
               </a:rPr>
-              <a:t>App + MCP containers from one image · SQLite · Docker · REST + MCP</a:t>
+              <a:t>App + MCP containers from one image · PostgreSQL · Docker / AWS Fargate · REST + MCP</a:t>
             </a:r>
             <a:endParaRPr lang="en-US" sz="1300" dirty="0"/>
           </a:p>
@@ -1770,7 +1770,7 @@
                 <a:ea typeface="Calibri" pitchFamily="34" charset="-122"/>
                 <a:cs typeface="Calibri" pitchFamily="34" charset="-120"/>
               </a:rPr>
-              <a:t>access · invitations · email · tasks · reports · search · AI · audit · backups</a:t>
+              <a:t>access · invitations · email · tasks · reports · search · AI · logos · audit · backups</a:t>
             </a:r>
             <a:endParaRPr lang="en-US" sz="1400" dirty="0"/>
           </a:p>
@@ -2111,7 +2111,7 @@
                 <a:ea typeface="Calibri" pitchFamily="34" charset="-122"/>
                 <a:cs typeface="Calibri" pitchFamily="34" charset="-120"/>
               </a:rPr>
-              <a:t>Data &amp; storage — shared Docker volume (mounted by app + MCP)</a:t>
+              <a:t>Data &amp; storage — RDS Postgres + shared file volume (app + MCP)</a:t>
             </a:r>
             <a:endParaRPr lang="en-US" sz="1100" dirty="0"/>
           </a:p>
@@ -2177,7 +2177,7 @@
                 <a:ea typeface="Calibri" pitchFamily="34" charset="-122"/>
                 <a:cs typeface="Calibri" pitchFamily="34" charset="-120"/>
               </a:rPr>
-              <a:t>SQLite database</a:t>
+              <a:t>PostgreSQL database</a:t>
             </a:r>
             <a:endParaRPr lang="en-US" sz="1400" dirty="0"/>
           </a:p>
@@ -2194,7 +2194,7 @@
                 <a:ea typeface="Calibri" pitchFamily="34" charset="-122"/>
                 <a:cs typeface="Calibri" pitchFamily="34" charset="-120"/>
               </a:rPr>
-              <a:t>WAL · FTS5 search</a:t>
+              <a:t>Amazon RDS · tsvector FTS</a:t>
             </a:r>
             <a:endParaRPr lang="en-US" sz="1400" dirty="0"/>
           </a:p>
@@ -2277,7 +2277,7 @@
                 <a:ea typeface="Calibri" pitchFamily="34" charset="-122"/>
                 <a:cs typeface="Calibri" pitchFamily="34" charset="-120"/>
               </a:rPr>
-              <a:t>images · docs · backups</a:t>
+              <a:t>images · docs · logos · backups</a:t>
             </a:r>
             <a:endParaRPr lang="en-US" sz="1400" dirty="0"/>
           </a:p>
@@ -2811,7 +2811,7 @@
                 <a:ea typeface="Calibri" pitchFamily="34" charset="-122"/>
                 <a:cs typeface="Calibri" pitchFamily="34" charset="-120"/>
               </a:rPr>
-              <a:t>authentication (session · bearer · OIDC · MCP tokens)  ·  role-based access (admin / standard / external)  ·  audit log</a:t>
+              <a:t>authentication (session · bearer · OIDC · MCP tokens)  ·  role-based access (admin / manager / standard / external)  ·  audit log</a:t>
             </a:r>
             <a:endParaRPr lang="en-US" sz="1200" dirty="0"/>
           </a:p>
@@ -2921,7 +2921,7 @@
                 <a:ea typeface="Calibri" pitchFamily="34" charset="-122"/>
                 <a:cs typeface="Calibri" pitchFamily="34" charset="-120"/>
               </a:rPr>
-              <a:t>~34 tables across six domains · SQLAlchemy 2.0 ORM on SQLite</a:t>
+              <a:t>~56 tables across six domains · SQLAlchemy 2.0 ORM on PostgreSQL</a:t>
             </a:r>
             <a:endParaRPr lang="en-US" sz="1300" dirty="0"/>
           </a:p>
@@ -3010,7 +3010,7 @@
               <a:buNone/>
             </a:pPr>
             <a:r>
-              <a:rPr lang="en-US" sz="1100" dirty="0">
+              <a:rPr lang="en-US" sz="900" dirty="0">
                 <a:solidFill>
                   <a:srgbClr val="444441"/>
                 </a:solidFill>
@@ -3027,7 +3027,7 @@
               <a:buNone/>
             </a:pPr>
             <a:r>
-              <a:rPr lang="en-US" sz="1100" dirty="0">
+              <a:rPr lang="en-US" sz="900" dirty="0">
                 <a:solidFill>
                   <a:srgbClr val="444441"/>
                 </a:solidFill>
@@ -3044,7 +3044,7 @@
               <a:buNone/>
             </a:pPr>
             <a:r>
-              <a:rPr lang="en-US" sz="1100" dirty="0">
+              <a:rPr lang="en-US" sz="900" dirty="0">
                 <a:solidFill>
                   <a:srgbClr val="444441"/>
                 </a:solidFill>
@@ -3061,7 +3061,7 @@
               <a:buNone/>
             </a:pPr>
             <a:r>
-              <a:rPr lang="en-US" sz="1100" dirty="0">
+              <a:rPr lang="en-US" sz="900" dirty="0">
                 <a:solidFill>
                   <a:srgbClr val="444441"/>
                 </a:solidFill>
@@ -3078,7 +3078,7 @@
               <a:buNone/>
             </a:pPr>
             <a:r>
-              <a:rPr lang="en-US" sz="1100" dirty="0">
+              <a:rPr lang="en-US" sz="900" dirty="0">
                 <a:solidFill>
                   <a:srgbClr val="444441"/>
                 </a:solidFill>
@@ -3087,6 +3087,142 @@
                 <a:cs typeface="Courier New" pitchFamily="34" charset="-120"/>
               </a:rPr>
               <a:t>screenshots</a:t>
+            </a:r>
+            <a:endParaRPr lang="en-US" sz="1500" dirty="0"/>
+          </a:p>
+          <a:p>
+            <a:pPr algn="l" indent="0" marL="0">
+              <a:buNone/>
+            </a:pPr>
+            <a:r>
+              <a:rPr lang="en-US" sz="900" dirty="0">
+                <a:solidFill>
+                  <a:srgbClr val="444441"/>
+                </a:solidFill>
+                <a:latin typeface="Courier New" pitchFamily="34" charset="0"/>
+                <a:ea typeface="Courier New" pitchFamily="34" charset="-122"/>
+                <a:cs typeface="Courier New" pitchFamily="34" charset="-120"/>
+              </a:rPr>
+              <a:t>project_milestones</a:t>
+            </a:r>
+            <a:endParaRPr lang="en-US" sz="1500" dirty="0"/>
+          </a:p>
+          <a:p>
+            <a:pPr algn="l" indent="0" marL="0">
+              <a:buNone/>
+            </a:pPr>
+            <a:r>
+              <a:rPr lang="en-US" sz="900" dirty="0">
+                <a:solidFill>
+                  <a:srgbClr val="444441"/>
+                </a:solidFill>
+                <a:latin typeface="Courier New" pitchFamily="34" charset="0"/>
+                <a:ea typeface="Courier New" pitchFamily="34" charset="-122"/>
+                <a:cs typeface="Courier New" pitchFamily="34" charset="-120"/>
+              </a:rPr>
+              <a:t>project_types</a:t>
+            </a:r>
+            <a:endParaRPr lang="en-US" sz="1500" dirty="0"/>
+          </a:p>
+          <a:p>
+            <a:pPr algn="l" indent="0" marL="0">
+              <a:buNone/>
+            </a:pPr>
+            <a:r>
+              <a:rPr lang="en-US" sz="900" dirty="0">
+                <a:solidFill>
+                  <a:srgbClr val="444441"/>
+                </a:solidFill>
+                <a:latin typeface="Courier New" pitchFamily="34" charset="0"/>
+                <a:ea typeface="Courier New" pitchFamily="34" charset="-122"/>
+                <a:cs typeface="Courier New" pitchFamily="34" charset="-120"/>
+              </a:rPr>
+              <a:t>project_category_orders</a:t>
+            </a:r>
+            <a:endParaRPr lang="en-US" sz="1500" dirty="0"/>
+          </a:p>
+          <a:p>
+            <a:pPr algn="l" indent="0" marL="0">
+              <a:buNone/>
+            </a:pPr>
+            <a:r>
+              <a:rPr lang="en-US" sz="900" dirty="0">
+                <a:solidFill>
+                  <a:srgbClr val="444441"/>
+                </a:solidFill>
+                <a:latin typeface="Courier New" pitchFamily="34" charset="0"/>
+                <a:ea typeface="Courier New" pitchFamily="34" charset="-122"/>
+                <a:cs typeface="Courier New" pitchFamily="34" charset="-120"/>
+              </a:rPr>
+              <a:t>milestone_defaults</a:t>
+            </a:r>
+            <a:endParaRPr lang="en-US" sz="1500" dirty="0"/>
+          </a:p>
+          <a:p>
+            <a:pPr algn="l" indent="0" marL="0">
+              <a:buNone/>
+            </a:pPr>
+            <a:r>
+              <a:rPr lang="en-US" sz="900" dirty="0">
+                <a:solidFill>
+                  <a:srgbClr val="444441"/>
+                </a:solidFill>
+                <a:latin typeface="Courier New" pitchFamily="34" charset="0"/>
+                <a:ea typeface="Courier New" pitchFamily="34" charset="-122"/>
+                <a:cs typeface="Courier New" pitchFamily="34" charset="-120"/>
+              </a:rPr>
+              <a:t>poc_templates</a:t>
+            </a:r>
+            <a:endParaRPr lang="en-US" sz="1500" dirty="0"/>
+          </a:p>
+          <a:p>
+            <a:pPr algn="l" indent="0" marL="0">
+              <a:buNone/>
+            </a:pPr>
+            <a:r>
+              <a:rPr lang="en-US" sz="900" dirty="0">
+                <a:solidFill>
+                  <a:srgbClr val="444441"/>
+                </a:solidFill>
+                <a:latin typeface="Courier New" pitchFamily="34" charset="0"/>
+                <a:ea typeface="Courier New" pitchFamily="34" charset="-122"/>
+                <a:cs typeface="Courier New" pitchFamily="34" charset="-120"/>
+              </a:rPr>
+              <a:t>poc_template_use_cases</a:t>
+            </a:r>
+            <a:endParaRPr lang="en-US" sz="1500" dirty="0"/>
+          </a:p>
+          <a:p>
+            <a:pPr algn="l" indent="0" marL="0">
+              <a:buNone/>
+            </a:pPr>
+            <a:r>
+              <a:rPr lang="en-US" sz="900" dirty="0">
+                <a:solidFill>
+                  <a:srgbClr val="444441"/>
+                </a:solidFill>
+                <a:latin typeface="Courier New" pitchFamily="34" charset="0"/>
+                <a:ea typeface="Courier New" pitchFamily="34" charset="-122"/>
+                <a:cs typeface="Courier New" pitchFamily="34" charset="-120"/>
+              </a:rPr>
+              <a:t>poc_template_tasks</a:t>
+            </a:r>
+            <a:endParaRPr lang="en-US" sz="1500" dirty="0"/>
+          </a:p>
+          <a:p>
+            <a:pPr algn="l" indent="0" marL="0">
+              <a:buNone/>
+            </a:pPr>
+            <a:r>
+              <a:rPr lang="en-US" sz="900" dirty="0">
+                <a:solidFill>
+                  <a:srgbClr val="444441"/>
+                </a:solidFill>
+                <a:latin typeface="Courier New" pitchFamily="34" charset="0"/>
+                <a:ea typeface="Courier New" pitchFamily="34" charset="-122"/>
+                <a:cs typeface="Courier New" pitchFamily="34" charset="-120"/>
+              </a:rPr>
+              <a:t>poc_template_milestones</a:t>
             </a:r>
             <a:endParaRPr lang="en-US" sz="1500" dirty="0"/>
           </a:p>
@@ -3175,7 +3311,7 @@
               <a:buNone/>
             </a:pPr>
             <a:r>
-              <a:rPr lang="en-US" sz="1100" dirty="0">
+              <a:rPr lang="en-US" sz="900" dirty="0">
                 <a:solidFill>
                   <a:srgbClr val="444441"/>
                 </a:solidFill>
@@ -3192,7 +3328,7 @@
               <a:buNone/>
             </a:pPr>
             <a:r>
-              <a:rPr lang="en-US" sz="1100" dirty="0">
+              <a:rPr lang="en-US" sz="900" dirty="0">
                 <a:solidFill>
                   <a:srgbClr val="444441"/>
                 </a:solidFill>
@@ -3209,7 +3345,7 @@
               <a:buNone/>
             </a:pPr>
             <a:r>
-              <a:rPr lang="en-US" sz="1100" dirty="0">
+              <a:rPr lang="en-US" sz="900" dirty="0">
                 <a:solidFill>
                   <a:srgbClr val="444441"/>
                 </a:solidFill>
@@ -3226,7 +3362,7 @@
               <a:buNone/>
             </a:pPr>
             <a:r>
-              <a:rPr lang="en-US" sz="1100" dirty="0">
+              <a:rPr lang="en-US" sz="900" dirty="0">
                 <a:solidFill>
                   <a:srgbClr val="444441"/>
                 </a:solidFill>
@@ -3243,7 +3379,7 @@
               <a:buNone/>
             </a:pPr>
             <a:r>
-              <a:rPr lang="en-US" sz="1100" dirty="0">
+              <a:rPr lang="en-US" sz="900" dirty="0">
                 <a:solidFill>
                   <a:srgbClr val="444441"/>
                 </a:solidFill>
@@ -3260,7 +3396,7 @@
               <a:buNone/>
             </a:pPr>
             <a:r>
-              <a:rPr lang="en-US" sz="1100" dirty="0">
+              <a:rPr lang="en-US" sz="900" dirty="0">
                 <a:solidFill>
                   <a:srgbClr val="444441"/>
                 </a:solidFill>
@@ -3357,7 +3493,7 @@
               <a:buNone/>
             </a:pPr>
             <a:r>
-              <a:rPr lang="en-US" sz="1100" dirty="0">
+              <a:rPr lang="en-US" sz="900" dirty="0">
                 <a:solidFill>
                   <a:srgbClr val="444441"/>
                 </a:solidFill>
@@ -3374,7 +3510,7 @@
               <a:buNone/>
             </a:pPr>
             <a:r>
-              <a:rPr lang="en-US" sz="1100" dirty="0">
+              <a:rPr lang="en-US" sz="900" dirty="0">
                 <a:solidFill>
                   <a:srgbClr val="444441"/>
                 </a:solidFill>
@@ -3391,7 +3527,7 @@
               <a:buNone/>
             </a:pPr>
             <a:r>
-              <a:rPr lang="en-US" sz="1100" dirty="0">
+              <a:rPr lang="en-US" sz="900" dirty="0">
                 <a:solidFill>
                   <a:srgbClr val="444441"/>
                 </a:solidFill>
@@ -3488,7 +3624,7 @@
               <a:buNone/>
             </a:pPr>
             <a:r>
-              <a:rPr lang="en-US" sz="1100" dirty="0">
+              <a:rPr lang="en-US" sz="900" dirty="0">
                 <a:solidFill>
                   <a:srgbClr val="444441"/>
                 </a:solidFill>
@@ -3505,7 +3641,7 @@
               <a:buNone/>
             </a:pPr>
             <a:r>
-              <a:rPr lang="en-US" sz="1100" dirty="0">
+              <a:rPr lang="en-US" sz="900" dirty="0">
                 <a:solidFill>
                   <a:srgbClr val="444441"/>
                 </a:solidFill>
@@ -3522,7 +3658,7 @@
               <a:buNone/>
             </a:pPr>
             <a:r>
-              <a:rPr lang="en-US" sz="1100" dirty="0">
+              <a:rPr lang="en-US" sz="900" dirty="0">
                 <a:solidFill>
                   <a:srgbClr val="444441"/>
                 </a:solidFill>
@@ -3539,7 +3675,24 @@
               <a:buNone/>
             </a:pPr>
             <a:r>
-              <a:rPr lang="en-US" sz="1100" dirty="0">
+              <a:rPr lang="en-US" sz="900" dirty="0">
+                <a:solidFill>
+                  <a:srgbClr val="444441"/>
+                </a:solidFill>
+                <a:latin typeface="Courier New" pitchFamily="34" charset="0"/>
+                <a:ea typeface="Courier New" pitchFamily="34" charset="-122"/>
+                <a:cs typeface="Courier New" pitchFamily="34" charset="-120"/>
+              </a:rPr>
+              <a:t>project_share_links</a:t>
+            </a:r>
+            <a:endParaRPr lang="en-US" sz="1500" dirty="0"/>
+          </a:p>
+          <a:p>
+            <a:pPr algn="l" indent="0" marL="0">
+              <a:buNone/>
+            </a:pPr>
+            <a:r>
+              <a:rPr lang="en-US" sz="900" dirty="0">
                 <a:solidFill>
                   <a:srgbClr val="444441"/>
                 </a:solidFill>
@@ -3556,7 +3709,7 @@
               <a:buNone/>
             </a:pPr>
             <a:r>
-              <a:rPr lang="en-US" sz="1100" dirty="0">
+              <a:rPr lang="en-US" sz="900" dirty="0">
                 <a:solidFill>
                   <a:srgbClr val="444441"/>
                 </a:solidFill>
@@ -3565,6 +3718,125 @@
                 <a:cs typeface="Courier New" pitchFamily="34" charset="-120"/>
               </a:rPr>
               <a:t>auth_providers</a:t>
+            </a:r>
+            <a:endParaRPr lang="en-US" sz="1500" dirty="0"/>
+          </a:p>
+          <a:p>
+            <a:pPr algn="l" indent="0" marL="0">
+              <a:buNone/>
+            </a:pPr>
+            <a:r>
+              <a:rPr lang="en-US" sz="900" dirty="0">
+                <a:solidFill>
+                  <a:srgbClr val="444441"/>
+                </a:solidFill>
+                <a:latin typeface="Courier New" pitchFamily="34" charset="0"/>
+                <a:ea typeface="Courier New" pitchFamily="34" charset="-122"/>
+                <a:cs typeface="Courier New" pitchFamily="34" charset="-120"/>
+              </a:rPr>
+              <a:t>password_reset_tokens</a:t>
+            </a:r>
+            <a:endParaRPr lang="en-US" sz="1500" dirty="0"/>
+          </a:p>
+          <a:p>
+            <a:pPr algn="l" indent="0" marL="0">
+              <a:buNone/>
+            </a:pPr>
+            <a:r>
+              <a:rPr lang="en-US" sz="900" dirty="0">
+                <a:solidFill>
+                  <a:srgbClr val="444441"/>
+                </a:solidFill>
+                <a:latin typeface="Courier New" pitchFamily="34" charset="0"/>
+                <a:ea typeface="Courier New" pitchFamily="34" charset="-122"/>
+                <a:cs typeface="Courier New" pitchFamily="34" charset="-120"/>
+              </a:rPr>
+              <a:t>regions</a:t>
+            </a:r>
+            <a:endParaRPr lang="en-US" sz="1500" dirty="0"/>
+          </a:p>
+          <a:p>
+            <a:pPr algn="l" indent="0" marL="0">
+              <a:buNone/>
+            </a:pPr>
+            <a:r>
+              <a:rPr lang="en-US" sz="900" dirty="0">
+                <a:solidFill>
+                  <a:srgbClr val="444441"/>
+                </a:solidFill>
+                <a:latin typeface="Courier New" pitchFamily="34" charset="0"/>
+                <a:ea typeface="Courier New" pitchFamily="34" charset="-122"/>
+                <a:cs typeface="Courier New" pitchFamily="34" charset="-120"/>
+              </a:rPr>
+              <a:t>user_regions</a:t>
+            </a:r>
+            <a:endParaRPr lang="en-US" sz="1500" dirty="0"/>
+          </a:p>
+          <a:p>
+            <a:pPr algn="l" indent="0" marL="0">
+              <a:buNone/>
+            </a:pPr>
+            <a:r>
+              <a:rPr lang="en-US" sz="900" dirty="0">
+                <a:solidFill>
+                  <a:srgbClr val="444441"/>
+                </a:solidFill>
+                <a:latin typeface="Courier New" pitchFamily="34" charset="0"/>
+                <a:ea typeface="Courier New" pitchFamily="34" charset="-122"/>
+                <a:cs typeface="Courier New" pitchFamily="34" charset="-120"/>
+              </a:rPr>
+              <a:t>capabilities</a:t>
+            </a:r>
+            <a:endParaRPr lang="en-US" sz="1500" dirty="0"/>
+          </a:p>
+          <a:p>
+            <a:pPr algn="l" indent="0" marL="0">
+              <a:buNone/>
+            </a:pPr>
+            <a:r>
+              <a:rPr lang="en-US" sz="900" dirty="0">
+                <a:solidFill>
+                  <a:srgbClr val="444441"/>
+                </a:solidFill>
+                <a:latin typeface="Courier New" pitchFamily="34" charset="0"/>
+                <a:ea typeface="Courier New" pitchFamily="34" charset="-122"/>
+                <a:cs typeface="Courier New" pitchFamily="34" charset="-120"/>
+              </a:rPr>
+              <a:t>roles</a:t>
+            </a:r>
+            <a:endParaRPr lang="en-US" sz="1500" dirty="0"/>
+          </a:p>
+          <a:p>
+            <a:pPr algn="l" indent="0" marL="0">
+              <a:buNone/>
+            </a:pPr>
+            <a:r>
+              <a:rPr lang="en-US" sz="900" dirty="0">
+                <a:solidFill>
+                  <a:srgbClr val="444441"/>
+                </a:solidFill>
+                <a:latin typeface="Courier New" pitchFamily="34" charset="0"/>
+                <a:ea typeface="Courier New" pitchFamily="34" charset="-122"/>
+                <a:cs typeface="Courier New" pitchFamily="34" charset="-120"/>
+              </a:rPr>
+              <a:t>role_capabilities</a:t>
+            </a:r>
+            <a:endParaRPr lang="en-US" sz="1500" dirty="0"/>
+          </a:p>
+          <a:p>
+            <a:pPr algn="l" indent="0" marL="0">
+              <a:buNone/>
+            </a:pPr>
+            <a:r>
+              <a:rPr lang="en-US" sz="900" dirty="0">
+                <a:solidFill>
+                  <a:srgbClr val="444441"/>
+                </a:solidFill>
+                <a:latin typeface="Courier New" pitchFamily="34" charset="0"/>
+                <a:ea typeface="Courier New" pitchFamily="34" charset="-122"/>
+                <a:cs typeface="Courier New" pitchFamily="34" charset="-120"/>
+              </a:rPr>
+              <a:t>user_roles</a:t>
             </a:r>
             <a:endParaRPr lang="en-US" sz="1500" dirty="0"/>
           </a:p>
@@ -3653,7 +3925,7 @@
               <a:buNone/>
             </a:pPr>
             <a:r>
-              <a:rPr lang="en-US" sz="1100" dirty="0">
+              <a:rPr lang="en-US" sz="900" dirty="0">
                 <a:solidFill>
                   <a:srgbClr val="444441"/>
                 </a:solidFill>
@@ -3670,7 +3942,7 @@
               <a:buNone/>
             </a:pPr>
             <a:r>
-              <a:rPr lang="en-US" sz="1100" dirty="0">
+              <a:rPr lang="en-US" sz="900" dirty="0">
                 <a:solidFill>
                   <a:srgbClr val="444441"/>
                 </a:solidFill>
@@ -3687,7 +3959,7 @@
               <a:buNone/>
             </a:pPr>
             <a:r>
-              <a:rPr lang="en-US" sz="1100" dirty="0">
+              <a:rPr lang="en-US" sz="900" dirty="0">
                 <a:solidFill>
                   <a:srgbClr val="444441"/>
                 </a:solidFill>
@@ -3704,7 +3976,7 @@
               <a:buNone/>
             </a:pPr>
             <a:r>
-              <a:rPr lang="en-US" sz="1100" dirty="0">
+              <a:rPr lang="en-US" sz="900" dirty="0">
                 <a:solidFill>
                   <a:srgbClr val="444441"/>
                 </a:solidFill>
@@ -3721,7 +3993,7 @@
               <a:buNone/>
             </a:pPr>
             <a:r>
-              <a:rPr lang="en-US" sz="1100" dirty="0">
+              <a:rPr lang="en-US" sz="900" dirty="0">
                 <a:solidFill>
                   <a:srgbClr val="444441"/>
                 </a:solidFill>
@@ -3738,7 +4010,7 @@
               <a:buNone/>
             </a:pPr>
             <a:r>
-              <a:rPr lang="en-US" sz="1100" dirty="0">
+              <a:rPr lang="en-US" sz="900" dirty="0">
                 <a:solidFill>
                   <a:srgbClr val="444441"/>
                 </a:solidFill>
@@ -3755,7 +4027,7 @@
               <a:buNone/>
             </a:pPr>
             <a:r>
-              <a:rPr lang="en-US" sz="1100" dirty="0">
+              <a:rPr lang="en-US" sz="900" dirty="0">
                 <a:solidFill>
                   <a:srgbClr val="444441"/>
                 </a:solidFill>
@@ -3772,7 +4044,7 @@
               <a:buNone/>
             </a:pPr>
             <a:r>
-              <a:rPr lang="en-US" sz="1100" dirty="0">
+              <a:rPr lang="en-US" sz="900" dirty="0">
                 <a:solidFill>
                   <a:srgbClr val="444441"/>
                 </a:solidFill>
@@ -3789,7 +4061,7 @@
               <a:buNone/>
             </a:pPr>
             <a:r>
-              <a:rPr lang="en-US" sz="1100" dirty="0">
+              <a:rPr lang="en-US" sz="900" dirty="0">
                 <a:solidFill>
                   <a:srgbClr val="444441"/>
                 </a:solidFill>
@@ -3886,7 +4158,7 @@
               <a:buNone/>
             </a:pPr>
             <a:r>
-              <a:rPr lang="en-US" sz="1100" dirty="0">
+              <a:rPr lang="en-US" sz="900" dirty="0">
                 <a:solidFill>
                   <a:srgbClr val="444441"/>
                 </a:solidFill>
@@ -3903,7 +4175,7 @@
               <a:buNone/>
             </a:pPr>
             <a:r>
-              <a:rPr lang="en-US" sz="1100" dirty="0">
+              <a:rPr lang="en-US" sz="900" dirty="0">
                 <a:solidFill>
                   <a:srgbClr val="444441"/>
                 </a:solidFill>
@@ -3920,7 +4192,7 @@
               <a:buNone/>
             </a:pPr>
             <a:r>
-              <a:rPr lang="en-US" sz="1100" dirty="0">
+              <a:rPr lang="en-US" sz="900" dirty="0">
                 <a:solidFill>
                   <a:srgbClr val="444441"/>
                 </a:solidFill>
@@ -3937,7 +4209,92 @@
               <a:buNone/>
             </a:pPr>
             <a:r>
-              <a:rPr lang="en-US" sz="1100" dirty="0">
+              <a:rPr lang="en-US" sz="900" dirty="0">
+                <a:solidFill>
+                  <a:srgbClr val="444441"/>
+                </a:solidFill>
+                <a:latin typeface="Courier New" pitchFamily="34" charset="0"/>
+                <a:ea typeface="Courier New" pitchFamily="34" charset="-122"/>
+                <a:cs typeface="Courier New" pitchFamily="34" charset="-120"/>
+              </a:rPr>
+              <a:t>close_reasons</a:t>
+            </a:r>
+            <a:endParaRPr lang="en-US" sz="1500" dirty="0"/>
+          </a:p>
+          <a:p>
+            <a:pPr algn="l" indent="0" marL="0">
+              <a:buNone/>
+            </a:pPr>
+            <a:r>
+              <a:rPr lang="en-US" sz="900" dirty="0">
+                <a:solidFill>
+                  <a:srgbClr val="444441"/>
+                </a:solidFill>
+                <a:latin typeface="Courier New" pitchFamily="34" charset="0"/>
+                <a:ea typeface="Courier New" pitchFamily="34" charset="-122"/>
+                <a:cs typeface="Courier New" pitchFamily="34" charset="-120"/>
+              </a:rPr>
+              <a:t>feedback_statuses</a:t>
+            </a:r>
+            <a:endParaRPr lang="en-US" sz="1500" dirty="0"/>
+          </a:p>
+          <a:p>
+            <a:pPr algn="l" indent="0" marL="0">
+              <a:buNone/>
+            </a:pPr>
+            <a:r>
+              <a:rPr lang="en-US" sz="900" dirty="0">
+                <a:solidFill>
+                  <a:srgbClr val="444441"/>
+                </a:solidFill>
+                <a:latin typeface="Courier New" pitchFamily="34" charset="0"/>
+                <a:ea typeface="Courier New" pitchFamily="34" charset="-122"/>
+                <a:cs typeface="Courier New" pitchFamily="34" charset="-120"/>
+              </a:rPr>
+              <a:t>feedback</a:t>
+            </a:r>
+            <a:endParaRPr lang="en-US" sz="1500" dirty="0"/>
+          </a:p>
+          <a:p>
+            <a:pPr algn="l" indent="0" marL="0">
+              <a:buNone/>
+            </a:pPr>
+            <a:r>
+              <a:rPr lang="en-US" sz="900" dirty="0">
+                <a:solidFill>
+                  <a:srgbClr val="444441"/>
+                </a:solidFill>
+                <a:latin typeface="Courier New" pitchFamily="34" charset="0"/>
+                <a:ea typeface="Courier New" pitchFamily="34" charset="-122"/>
+                <a:cs typeface="Courier New" pitchFamily="34" charset="-120"/>
+              </a:rPr>
+              <a:t>feedback_comments</a:t>
+            </a:r>
+            <a:endParaRPr lang="en-US" sz="1500" dirty="0"/>
+          </a:p>
+          <a:p>
+            <a:pPr algn="l" indent="0" marL="0">
+              <a:buNone/>
+            </a:pPr>
+            <a:r>
+              <a:rPr lang="en-US" sz="900" dirty="0">
+                <a:solidFill>
+                  <a:srgbClr val="444441"/>
+                </a:solidFill>
+                <a:latin typeface="Courier New" pitchFamily="34" charset="0"/>
+                <a:ea typeface="Courier New" pitchFamily="34" charset="-122"/>
+                <a:cs typeface="Courier New" pitchFamily="34" charset="-120"/>
+              </a:rPr>
+              <a:t>saved_reports</a:t>
+            </a:r>
+            <a:endParaRPr lang="en-US" sz="1500" dirty="0"/>
+          </a:p>
+          <a:p>
+            <a:pPr algn="l" indent="0" marL="0">
+              <a:buNone/>
+            </a:pPr>
+            <a:r>
+              <a:rPr lang="en-US" sz="900" dirty="0">
                 <a:solidFill>
                   <a:srgbClr val="444441"/>
                 </a:solidFill>
@@ -3954,7 +4311,7 @@
               <a:buNone/>
             </a:pPr>
             <a:r>
-              <a:rPr lang="en-US" sz="1100" dirty="0">
+              <a:rPr lang="en-US" sz="900" dirty="0">
                 <a:solidFill>
                   <a:srgbClr val="444441"/>
                 </a:solidFill>
@@ -3971,7 +4328,7 @@
               <a:buNone/>
             </a:pPr>
             <a:r>
-              <a:rPr lang="en-US" sz="1100" dirty="0">
+              <a:rPr lang="en-US" sz="900" dirty="0">
                 <a:solidFill>
                   <a:srgbClr val="444441"/>
                 </a:solidFill>
@@ -3988,7 +4345,7 @@
               <a:buNone/>
             </a:pPr>
             <a:r>
-              <a:rPr lang="en-US" sz="1100" dirty="0">
+              <a:rPr lang="en-US" sz="900" dirty="0">
                 <a:solidFill>
                   <a:srgbClr val="444441"/>
                 </a:solidFill>
